--- a/docs/Usermanual.pptx
+++ b/docs/Usermanual.pptx
@@ -138,7 +138,7 @@
   <p:extLst>
     <p:ext uri="{521415D9-36F7-43E2-AB2F-B90AF26B5E84}">
       <p14:sectionLst xmlns:p14="http://schemas.microsoft.com/office/powerpoint/2010/main">
-        <p14:section name="Introduction" id="{6c305bc2-f3bc-82e9-c7f9-c8fcf31f35bd}">
+        <p14:section name="Introduction" id="{fbaa3c05-c23c-9613-6f9e-fc75ff3971b3}">
           <p14:sldIdLst>
             <p14:sldId id="256"/>
             <p14:sldId id="257"/>
@@ -146,7 +146,7 @@
             <p14:sldId id="259"/>
           </p14:sldIdLst>
         </p14:section>
-        <p14:section name="Who does what" id="{d8afb770-24f0-0878-c5d7-2f08598bce32}">
+        <p14:section name="Who does what" id="{db3084cb-25a1-1a85-72d3-1cd48af6003f}">
           <p14:sldIdLst>
             <p14:sldId id="260"/>
             <p14:sldId id="261"/>
@@ -155,7 +155,7 @@
             <p14:sldId id="264"/>
           </p14:sldIdLst>
         </p14:section>
-        <p14:section name="Getting started" id="{99607308-33b9-b09e-0814-f8167497e78f}">
+        <p14:section name="Getting started" id="{d5fae000-890f-f99a-68a8-5390acdf8965}">
           <p14:sldIdLst>
             <p14:sldId id="265"/>
             <p14:sldId id="266"/>
@@ -163,7 +163,7 @@
             <p14:sldId id="268"/>
           </p14:sldIdLst>
         </p14:section>
-        <p14:section name="Plan the year" id="{fb8b4813-9cd9-d039-69f2-4a6aff2afc87}">
+        <p14:section name="Plan the year" id="{b15e439e-dacf-e30c-9e39-f2f84ca08232}">
           <p14:sldIdLst>
             <p14:sldId id="269"/>
             <p14:sldId id="270"/>
@@ -171,7 +171,7 @@
             <p14:sldId id="272"/>
           </p14:sldIdLst>
         </p14:section>
-        <p14:section name="Perform the audit" id="{4a9c82f7-6f21-5bea-6a7c-8482cc3535e6}">
+        <p14:section name="Perform the audit" id="{08a6d68d-dbb3-44cc-bd82-cbaa73500bb3}">
           <p14:sldIdLst>
             <p14:sldId id="273"/>
             <p14:sldId id="274"/>
@@ -180,7 +180,7 @@
             <p14:sldId id="277"/>
           </p14:sldIdLst>
         </p14:section>
-        <p14:section name="Report and follow up" id="{588a3874-7515-3aec-1cd9-a1f05932014e}">
+        <p14:section name="Report and follow up" id="{b94080f9-1085-537e-94db-88737c4c8003}">
           <p14:sldIdLst>
             <p14:sldId id="278"/>
             <p14:sldId id="279"/>
@@ -188,14 +188,14 @@
             <p14:sldId id="281"/>
           </p14:sldIdLst>
         </p14:section>
-        <p14:section name="Governance and quality" id="{37fb918f-aaff-37bf-f016-4fad157b29da}">
+        <p14:section name="Governance and quality" id="{45430586-c7d5-6d14-64c7-1da446d2d14c}">
           <p14:sldIdLst>
             <p14:sldId id="282"/>
             <p14:sldId id="283"/>
             <p14:sldId id="284"/>
           </p14:sldIdLst>
         </p14:section>
-        <p14:section name="Auditees and quick reference" id="{f5e338b1-73fa-e077-9931-4334ea77059c}">
+        <p14:section name="Auditees and quick reference" id="{fb61684f-fe03-e5b3-7bbc-7e19ebe0653a}">
           <p14:sldIdLst>
             <p14:sldId id="285"/>
             <p14:sldId id="286"/>
@@ -5675,7 +5675,7 @@
                   <a:schemeClr val="tx1"/>
                 </a:solidFill>
               </a:rPr>
-              <a:t>Required fields marked *, plain-language errors, automatic drafts you can restore</a:t>
+              <a:t>Open in a right-hand panel that stays open until you close it, even after a refresh; drafts save as you type</a:t>
             </a:r>
             <a:endParaRPr lang="en-US" sz="1400" dirty="0"/>
           </a:p>
@@ -16906,7 +16906,7 @@
                   <a:schemeClr val="tx1"/>
                 </a:solidFill>
               </a:rPr>
-              <a:t>Drafts are saved as you type</a:t>
+              <a:t>Panels stay open; drafts save as you type</a:t>
             </a:r>
             <a:endParaRPr lang="en-US" sz="1400" dirty="0"/>
           </a:p>

--- a/docs/Usermanual.pptx
+++ b/docs/Usermanual.pptx
@@ -138,7 +138,7 @@
   <p:extLst>
     <p:ext uri="{521415D9-36F7-43E2-AB2F-B90AF26B5E84}">
       <p14:sectionLst xmlns:p14="http://schemas.microsoft.com/office/powerpoint/2010/main">
-        <p14:section name="Introduction" id="{fbaa3c05-c23c-9613-6f9e-fc75ff3971b3}">
+        <p14:section name="Introduction" id="{bb6514f5-1f36-f8e2-be70-d290cc2a995f}">
           <p14:sldIdLst>
             <p14:sldId id="256"/>
             <p14:sldId id="257"/>
@@ -146,7 +146,7 @@
             <p14:sldId id="259"/>
           </p14:sldIdLst>
         </p14:section>
-        <p14:section name="Who does what" id="{db3084cb-25a1-1a85-72d3-1cd48af6003f}">
+        <p14:section name="Who does what" id="{44331d30-b036-bfb0-e265-328fc9c9d791}">
           <p14:sldIdLst>
             <p14:sldId id="260"/>
             <p14:sldId id="261"/>
@@ -155,7 +155,7 @@
             <p14:sldId id="264"/>
           </p14:sldIdLst>
         </p14:section>
-        <p14:section name="Getting started" id="{d5fae000-890f-f99a-68a8-5390acdf8965}">
+        <p14:section name="Getting started" id="{38ac959e-f470-7796-ba3a-bf22cc82b0d2}">
           <p14:sldIdLst>
             <p14:sldId id="265"/>
             <p14:sldId id="266"/>
@@ -163,7 +163,7 @@
             <p14:sldId id="268"/>
           </p14:sldIdLst>
         </p14:section>
-        <p14:section name="Plan the year" id="{b15e439e-dacf-e30c-9e39-f2f84ca08232}">
+        <p14:section name="Plan the year" id="{062fcb9a-6c60-0af2-2492-570820412bc8}">
           <p14:sldIdLst>
             <p14:sldId id="269"/>
             <p14:sldId id="270"/>
@@ -171,7 +171,7 @@
             <p14:sldId id="272"/>
           </p14:sldIdLst>
         </p14:section>
-        <p14:section name="Perform the audit" id="{08a6d68d-dbb3-44cc-bd82-cbaa73500bb3}">
+        <p14:section name="Perform the audit" id="{33bac152-e0dc-7a93-0546-4e171de11717}">
           <p14:sldIdLst>
             <p14:sldId id="273"/>
             <p14:sldId id="274"/>
@@ -180,7 +180,7 @@
             <p14:sldId id="277"/>
           </p14:sldIdLst>
         </p14:section>
-        <p14:section name="Report and follow up" id="{b94080f9-1085-537e-94db-88737c4c8003}">
+        <p14:section name="Report and follow up" id="{b553aadb-5090-b8d9-0b07-51ba401a71e6}">
           <p14:sldIdLst>
             <p14:sldId id="278"/>
             <p14:sldId id="279"/>
@@ -188,14 +188,14 @@
             <p14:sldId id="281"/>
           </p14:sldIdLst>
         </p14:section>
-        <p14:section name="Governance and quality" id="{45430586-c7d5-6d14-64c7-1da446d2d14c}">
+        <p14:section name="Governance and quality" id="{c347dbd7-4698-d9c1-ab6e-4effe52f3bb9}">
           <p14:sldIdLst>
             <p14:sldId id="282"/>
             <p14:sldId id="283"/>
             <p14:sldId id="284"/>
           </p14:sldIdLst>
         </p14:section>
-        <p14:section name="Auditees and quick reference" id="{fb61684f-fe03-e5b3-7bbc-7e19ebe0653a}">
+        <p14:section name="Auditees and quick reference" id="{c7c743d8-fd13-c463-784d-9fa3bef3c2bb}">
           <p14:sldIdLst>
             <p14:sldId id="285"/>
             <p14:sldId id="286"/>
@@ -7972,7 +7972,7 @@
                   <a:schemeClr val="tx1"/>
                 </a:solidFill>
               </a:rPr>
-              <a:t>Tabs: </a:t>
+              <a:t>Phases: </a:t>
             </a:r>
             <a:pPr indent="0" marL="0">
               <a:spcAft>
@@ -7986,7 +7986,7 @@
                   <a:schemeClr val="tx1"/>
                 </a:solidFill>
               </a:rPr>
-              <a:t>Dashboard, Planning, Fieldwork, Reviews, Results, Issues, Progress, Requests</a:t>
+              <a:t>Plan (GIAS 13), Perform (14), Communicate (15.1), Monitor (15.2)</a:t>
             </a:r>
             <a:endParaRPr lang="en-US" sz="1500" dirty="0"/>
           </a:p>
@@ -8004,7 +8004,7 @@
                   <a:schemeClr val="tx1"/>
                 </a:solidFill>
               </a:rPr>
-              <a:t>Dashboard: </a:t>
+              <a:t>Tabs: </a:t>
             </a:r>
             <a:pPr indent="0" marL="0">
               <a:spcAft>
@@ -8018,7 +8018,7 @@
                   <a:schemeClr val="tx1"/>
                 </a:solidFill>
               </a:rPr>
-              <a:t>scope, auditees, team, declarations, closure readiness</a:t>
+              <a:t>Overview, Planning, Fieldwork, Findings, Report, Supervision &amp; review, Evidence requests</a:t>
             </a:r>
             <a:endParaRPr lang="en-US" sz="1500" dirty="0"/>
           </a:p>
@@ -9651,7 +9651,7 @@
                   <a:schemeClr val="tx1"/>
                 </a:solidFill>
               </a:rPr>
-              <a:t>Planning memo approved; engagement letter sent</a:t>
+              <a:t>Process narratives (GIAS 13.2)</a:t>
             </a:r>
             <a:endParaRPr lang="en-US" sz="1400" dirty="0"/>
           </a:p>
@@ -9748,7 +9748,7 @@
                   <a:schemeClr val="tx1"/>
                 </a:solidFill>
               </a:rPr>
-              <a:t>Risk and control matrix per objective</a:t>
+              <a:t>Risk &amp; control matrix: risk x control (13.2-13.4)</a:t>
             </a:r>
             <a:endParaRPr lang="en-US" sz="1400" dirty="0"/>
           </a:p>
@@ -9845,7 +9845,7 @@
                   <a:schemeClr val="tx1"/>
                 </a:solidFill>
               </a:rPr>
-              <a:t>Walkthroughs and tests with samples</a:t>
+              <a:t>Walkthroughs: test of design (14.1)</a:t>
             </a:r>
             <a:endParaRPr lang="en-US" sz="1400" dirty="0"/>
           </a:p>
@@ -9942,7 +9942,7 @@
                   <a:schemeClr val="tx1"/>
                 </a:solidFill>
               </a:rPr>
-              <a:t>Request evidence; accept or return it</a:t>
+              <a:t>Test plan: method, sample, attributes (13.6)</a:t>
             </a:r>
             <a:endParaRPr lang="en-US" sz="1400" dirty="0"/>
           </a:p>
@@ -10039,7 +10039,7 @@
                   <a:schemeClr val="tx1"/>
                 </a:solidFill>
               </a:rPr>
-              <a:t>Sign off each page; reviewers clear notes</a:t>
+              <a:t>Testing: operating effectiveness (14.2)</a:t>
             </a:r>
             <a:endParaRPr lang="en-US" sz="1400" dirty="0"/>
           </a:p>
